--- a/examples/revisao-operacional.pptx
+++ b/examples/revisao-operacional.pptx
@@ -537,7 +537,7 @@
       <c:catAx>
         <c:axId val="-2068027336"/>
         <c:scaling>
-          <c:orientation val="minMax"/>
+          <c:orientation val="maxMin"/>
         </c:scaling>
         <c:delete val="0"/>
         <c:axPos val="l"/>
@@ -607,7 +607,7 @@
           </a:p>
         </c:txPr>
         <c:crossAx val="-2068027336"/>
-        <c:crosses val="autoZero"/>
+        <c:crosses val="max"/>
       </c:valAx>
     </c:plotArea>
     <c:dispBlanksAs val="gap"/>
@@ -4022,7 +4022,7 @@
           <a:p>
             <a:pPr algn="l"/>
             <a:r>
-              <a:rPr sz="3750" b="1" i="0">
+              <a:rPr sz="3125" b="1" i="0">
                 <a:solidFill>
                   <a:srgbClr val="1A1A1A"/>
                 </a:solidFill>
@@ -4215,7 +4215,7 @@
           <a:p>
             <a:pPr algn="l"/>
             <a:r>
-              <a:rPr sz="3750" b="1" i="0">
+              <a:rPr sz="2500" b="1" i="0">
                 <a:solidFill>
                   <a:srgbClr val="1A1A1A"/>
                 </a:solidFill>
@@ -4601,7 +4601,7 @@
           <a:p>
             <a:pPr algn="l"/>
             <a:r>
-              <a:rPr sz="3750" b="1" i="0">
+              <a:rPr sz="3125" b="1" i="0">
                 <a:solidFill>
                   <a:srgbClr val="1A1A1A"/>
                 </a:solidFill>
@@ -4794,7 +4794,7 @@
           <a:p>
             <a:pPr algn="l"/>
             <a:r>
-              <a:rPr sz="3750" b="1" i="0">
+              <a:rPr sz="3625" b="1" i="0">
                 <a:solidFill>
                   <a:srgbClr val="1A1A1A"/>
                 </a:solidFill>

--- a/examples/revisao-operacional.pptx
+++ b/examples/revisao-operacional.pptx
@@ -3655,6 +3655,41 @@
         </p:nvSpPr>
         <p:spPr>
           <a:xfrm>
+            <a:off x="7772400" y="91440"/>
+            <a:ext cx="3959352" cy="228600"/>
+          </a:xfrm>
+          <a:prstGeom prst="rect">
+            <a:avLst/>
+          </a:prstGeom>
+          <a:noFill/>
+        </p:spPr>
+        <p:txBody>
+          <a:bodyPr wrap="square" anchor="ctr" lIns="45720" rIns="45720" tIns="27432" bIns="27432">
+            <a:spAutoFit/>
+          </a:bodyPr>
+          <a:lstStyle/>
+          <a:p>
+            <a:pPr algn="r"/>
+            <a:r>
+              <a:rPr sz="1125" b="0" i="0">
+                <a:solidFill>
+                  <a:srgbClr val="666666"/>
+                </a:solidFill>
+                <a:latin typeface="Arial"/>
+              </a:rPr>
+              <a:t>2026-09-01</a:t>
+            </a:r>
+          </a:p>
+        </p:txBody>
+      </p:sp>
+      <p:sp>
+        <p:nvSpPr>
+          <p:cNvPr id="4" name="TextBox 3"/>
+          <p:cNvSpPr txBox="1"/>
+          <p:nvPr/>
+        </p:nvSpPr>
+        <p:spPr>
+          <a:xfrm>
             <a:off x="10817352" y="6217920"/>
             <a:ext cx="914400" cy="365760"/>
           </a:xfrm>
@@ -3684,7 +3719,7 @@
       </p:sp>
       <p:sp>
         <p:nvSpPr>
-          <p:cNvPr id="4" name="Rectangle 3"/>
+          <p:cNvPr id="5" name="Rectangle 4"/>
           <p:cNvSpPr/>
           <p:nvPr/>
         </p:nvSpPr>
@@ -3728,7 +3763,7 @@
       </p:sp>
       <p:sp>
         <p:nvSpPr>
-          <p:cNvPr id="5" name="Rectangle 4"/>
+          <p:cNvPr id="6" name="Rectangle 5"/>
           <p:cNvSpPr/>
           <p:nvPr/>
         </p:nvSpPr>
@@ -3772,7 +3807,7 @@
       </p:sp>
       <p:sp>
         <p:nvSpPr>
-          <p:cNvPr id="6" name="TextBox 5"/>
+          <p:cNvPr id="7" name="TextBox 6"/>
           <p:cNvSpPr txBox="1"/>
           <p:nvPr/>
         </p:nvSpPr>
@@ -3807,7 +3842,7 @@
       </p:sp>
       <p:sp>
         <p:nvSpPr>
-          <p:cNvPr id="7" name="TextBox 6"/>
+          <p:cNvPr id="8" name="TextBox 7"/>
           <p:cNvSpPr txBox="1"/>
           <p:nvPr/>
         </p:nvSpPr>
@@ -3842,14 +3877,14 @@
       </p:sp>
       <p:sp>
         <p:nvSpPr>
-          <p:cNvPr id="8" name="TextBox 7"/>
+          <p:cNvPr id="9" name="TextBox 8"/>
           <p:cNvSpPr txBox="1"/>
           <p:nvPr/>
         </p:nvSpPr>
         <p:spPr>
           <a:xfrm>
-            <a:off x="594360" y="3154679"/>
-            <a:ext cx="1376172" cy="457200"/>
+            <a:off x="594360" y="3154680"/>
+            <a:ext cx="1376172" cy="411480"/>
           </a:xfrm>
           <a:prstGeom prst="rect">
             <a:avLst/>
@@ -3877,7 +3912,7 @@
       </p:sp>
       <p:sp>
         <p:nvSpPr>
-          <p:cNvPr id="9" name="Rectangle 8"/>
+          <p:cNvPr id="10" name="Rectangle 9"/>
           <p:cNvSpPr/>
           <p:nvPr/>
         </p:nvSpPr>
@@ -3921,7 +3956,7 @@
       </p:sp>
       <p:sp>
         <p:nvSpPr>
-          <p:cNvPr id="10" name="Rectangle 9"/>
+          <p:cNvPr id="11" name="Rectangle 10"/>
           <p:cNvSpPr/>
           <p:nvPr/>
         </p:nvSpPr>
@@ -3965,7 +4000,7 @@
       </p:sp>
       <p:sp>
         <p:nvSpPr>
-          <p:cNvPr id="11" name="TextBox 10"/>
+          <p:cNvPr id="12" name="TextBox 11"/>
           <p:cNvSpPr txBox="1"/>
           <p:nvPr/>
         </p:nvSpPr>
@@ -4000,7 +4035,7 @@
       </p:sp>
       <p:sp>
         <p:nvSpPr>
-          <p:cNvPr id="12" name="TextBox 11"/>
+          <p:cNvPr id="13" name="TextBox 12"/>
           <p:cNvSpPr txBox="1"/>
           <p:nvPr/>
         </p:nvSpPr>
@@ -4035,14 +4070,14 @@
       </p:sp>
       <p:sp>
         <p:nvSpPr>
-          <p:cNvPr id="13" name="TextBox 12"/>
+          <p:cNvPr id="14" name="TextBox 13"/>
           <p:cNvSpPr txBox="1"/>
           <p:nvPr/>
         </p:nvSpPr>
         <p:spPr>
           <a:xfrm>
-            <a:off x="2519172" y="3154679"/>
-            <a:ext cx="1376172" cy="457200"/>
+            <a:off x="2519172" y="3154680"/>
+            <a:ext cx="1376172" cy="411480"/>
           </a:xfrm>
           <a:prstGeom prst="rect">
             <a:avLst/>
@@ -4070,7 +4105,7 @@
       </p:sp>
       <p:sp>
         <p:nvSpPr>
-          <p:cNvPr id="14" name="Rectangle 13"/>
+          <p:cNvPr id="15" name="Rectangle 14"/>
           <p:cNvSpPr/>
           <p:nvPr/>
         </p:nvSpPr>
@@ -4114,7 +4149,7 @@
       </p:sp>
       <p:sp>
         <p:nvSpPr>
-          <p:cNvPr id="15" name="Rectangle 14"/>
+          <p:cNvPr id="16" name="Rectangle 15"/>
           <p:cNvSpPr/>
           <p:nvPr/>
         </p:nvSpPr>
@@ -4158,7 +4193,7 @@
       </p:sp>
       <p:sp>
         <p:nvSpPr>
-          <p:cNvPr id="16" name="TextBox 15"/>
+          <p:cNvPr id="17" name="TextBox 16"/>
           <p:cNvSpPr txBox="1"/>
           <p:nvPr/>
         </p:nvSpPr>
@@ -4193,7 +4228,7 @@
       </p:sp>
       <p:sp>
         <p:nvSpPr>
-          <p:cNvPr id="17" name="TextBox 16"/>
+          <p:cNvPr id="18" name="TextBox 17"/>
           <p:cNvSpPr txBox="1"/>
           <p:nvPr/>
         </p:nvSpPr>
@@ -4228,14 +4263,14 @@
       </p:sp>
       <p:sp>
         <p:nvSpPr>
-          <p:cNvPr id="18" name="TextBox 17"/>
+          <p:cNvPr id="19" name="TextBox 18"/>
           <p:cNvSpPr txBox="1"/>
           <p:nvPr/>
         </p:nvSpPr>
         <p:spPr>
           <a:xfrm>
-            <a:off x="4443984" y="3154679"/>
-            <a:ext cx="1376172" cy="457200"/>
+            <a:off x="4443984" y="3154680"/>
+            <a:ext cx="1376172" cy="411480"/>
           </a:xfrm>
           <a:prstGeom prst="rect">
             <a:avLst/>
@@ -4263,7 +4298,7 @@
       </p:sp>
       <p:sp>
         <p:nvSpPr>
-          <p:cNvPr id="19" name="Rectangle 18"/>
+          <p:cNvPr id="20" name="Rectangle 19"/>
           <p:cNvSpPr/>
           <p:nvPr/>
         </p:nvSpPr>
@@ -4307,7 +4342,7 @@
       </p:sp>
       <p:sp>
         <p:nvSpPr>
-          <p:cNvPr id="20" name="Rectangle 19"/>
+          <p:cNvPr id="21" name="Rectangle 20"/>
           <p:cNvSpPr/>
           <p:nvPr/>
         </p:nvSpPr>
@@ -4351,7 +4386,7 @@
       </p:sp>
       <p:sp>
         <p:nvSpPr>
-          <p:cNvPr id="21" name="TextBox 20"/>
+          <p:cNvPr id="22" name="TextBox 21"/>
           <p:cNvSpPr txBox="1"/>
           <p:nvPr/>
         </p:nvSpPr>
@@ -4386,7 +4421,7 @@
       </p:sp>
       <p:sp>
         <p:nvSpPr>
-          <p:cNvPr id="22" name="TextBox 21"/>
+          <p:cNvPr id="23" name="TextBox 22"/>
           <p:cNvSpPr txBox="1"/>
           <p:nvPr/>
         </p:nvSpPr>
@@ -4421,14 +4456,14 @@
       </p:sp>
       <p:sp>
         <p:nvSpPr>
-          <p:cNvPr id="23" name="TextBox 22"/>
+          <p:cNvPr id="24" name="TextBox 23"/>
           <p:cNvSpPr txBox="1"/>
           <p:nvPr/>
         </p:nvSpPr>
         <p:spPr>
           <a:xfrm>
-            <a:off x="6368796" y="3154679"/>
-            <a:ext cx="1376172" cy="457200"/>
+            <a:off x="6368796" y="3154680"/>
+            <a:ext cx="1376172" cy="411480"/>
           </a:xfrm>
           <a:prstGeom prst="rect">
             <a:avLst/>
@@ -4456,7 +4491,7 @@
       </p:sp>
       <p:sp>
         <p:nvSpPr>
-          <p:cNvPr id="24" name="Rectangle 23"/>
+          <p:cNvPr id="25" name="Rectangle 24"/>
           <p:cNvSpPr/>
           <p:nvPr/>
         </p:nvSpPr>
@@ -4500,7 +4535,7 @@
       </p:sp>
       <p:sp>
         <p:nvSpPr>
-          <p:cNvPr id="25" name="Rectangle 24"/>
+          <p:cNvPr id="26" name="Rectangle 25"/>
           <p:cNvSpPr/>
           <p:nvPr/>
         </p:nvSpPr>
@@ -4544,7 +4579,7 @@
       </p:sp>
       <p:sp>
         <p:nvSpPr>
-          <p:cNvPr id="26" name="TextBox 25"/>
+          <p:cNvPr id="27" name="TextBox 26"/>
           <p:cNvSpPr txBox="1"/>
           <p:nvPr/>
         </p:nvSpPr>
@@ -4579,7 +4614,7 @@
       </p:sp>
       <p:sp>
         <p:nvSpPr>
-          <p:cNvPr id="27" name="TextBox 26"/>
+          <p:cNvPr id="28" name="TextBox 27"/>
           <p:cNvSpPr txBox="1"/>
           <p:nvPr/>
         </p:nvSpPr>
@@ -4614,14 +4649,14 @@
       </p:sp>
       <p:sp>
         <p:nvSpPr>
-          <p:cNvPr id="28" name="TextBox 27"/>
+          <p:cNvPr id="29" name="TextBox 28"/>
           <p:cNvSpPr txBox="1"/>
           <p:nvPr/>
         </p:nvSpPr>
         <p:spPr>
           <a:xfrm>
-            <a:off x="8293608" y="3154679"/>
-            <a:ext cx="1376172" cy="457200"/>
+            <a:off x="8293608" y="3154680"/>
+            <a:ext cx="1376172" cy="411480"/>
           </a:xfrm>
           <a:prstGeom prst="rect">
             <a:avLst/>
@@ -4649,7 +4684,7 @@
       </p:sp>
       <p:sp>
         <p:nvSpPr>
-          <p:cNvPr id="29" name="Rectangle 28"/>
+          <p:cNvPr id="30" name="Rectangle 29"/>
           <p:cNvSpPr/>
           <p:nvPr/>
         </p:nvSpPr>
@@ -4693,7 +4728,7 @@
       </p:sp>
       <p:sp>
         <p:nvSpPr>
-          <p:cNvPr id="30" name="Rectangle 29"/>
+          <p:cNvPr id="31" name="Rectangle 30"/>
           <p:cNvSpPr/>
           <p:nvPr/>
         </p:nvSpPr>
@@ -4737,7 +4772,7 @@
       </p:sp>
       <p:sp>
         <p:nvSpPr>
-          <p:cNvPr id="31" name="TextBox 30"/>
+          <p:cNvPr id="32" name="TextBox 31"/>
           <p:cNvSpPr txBox="1"/>
           <p:nvPr/>
         </p:nvSpPr>
@@ -4772,7 +4807,7 @@
       </p:sp>
       <p:sp>
         <p:nvSpPr>
-          <p:cNvPr id="32" name="TextBox 31"/>
+          <p:cNvPr id="33" name="TextBox 32"/>
           <p:cNvSpPr txBox="1"/>
           <p:nvPr/>
         </p:nvSpPr>
@@ -4807,14 +4842,14 @@
       </p:sp>
       <p:sp>
         <p:nvSpPr>
-          <p:cNvPr id="33" name="TextBox 32"/>
+          <p:cNvPr id="34" name="TextBox 33"/>
           <p:cNvSpPr txBox="1"/>
           <p:nvPr/>
         </p:nvSpPr>
         <p:spPr>
           <a:xfrm>
-            <a:off x="10218420" y="3154679"/>
-            <a:ext cx="1376172" cy="457200"/>
+            <a:off x="10218420" y="3154680"/>
+            <a:ext cx="1376172" cy="411480"/>
           </a:xfrm>
           <a:prstGeom prst="rect">
             <a:avLst/>
@@ -4899,8 +4934,43 @@
         </p:nvSpPr>
         <p:spPr>
           <a:xfrm>
+            <a:off x="7772400" y="91440"/>
+            <a:ext cx="3959352" cy="228600"/>
+          </a:xfrm>
+          <a:prstGeom prst="rect">
+            <a:avLst/>
+          </a:prstGeom>
+          <a:noFill/>
+        </p:spPr>
+        <p:txBody>
+          <a:bodyPr wrap="square" anchor="ctr" lIns="45720" rIns="45720" tIns="27432" bIns="27432">
+            <a:spAutoFit/>
+          </a:bodyPr>
+          <a:lstStyle/>
+          <a:p>
+            <a:pPr algn="r"/>
+            <a:r>
+              <a:rPr sz="1125" b="0" i="0">
+                <a:solidFill>
+                  <a:srgbClr val="666666"/>
+                </a:solidFill>
+                <a:latin typeface="Arial"/>
+              </a:rPr>
+              <a:t>2026-09-01</a:t>
+            </a:r>
+          </a:p>
+        </p:txBody>
+      </p:sp>
+      <p:sp>
+        <p:nvSpPr>
+          <p:cNvPr id="4" name="TextBox 3"/>
+          <p:cNvSpPr txBox="1"/>
+          <p:nvPr/>
+        </p:nvSpPr>
+        <p:spPr>
+          <a:xfrm>
             <a:off x="457200" y="6217920"/>
-            <a:ext cx="10360152" cy="365760"/>
+            <a:ext cx="8531352" cy="365760"/>
           </a:xfrm>
           <a:prstGeom prst="rect">
             <a:avLst/>
@@ -4928,7 +4998,7 @@
       </p:sp>
       <p:sp>
         <p:nvSpPr>
-          <p:cNvPr id="4" name="TextBox 3"/>
+          <p:cNvPr id="5" name="TextBox 4"/>
           <p:cNvSpPr txBox="1"/>
           <p:nvPr/>
         </p:nvSpPr>
@@ -4963,7 +5033,7 @@
       </p:sp>
       <p:graphicFrame>
         <p:nvGraphicFramePr>
-          <p:cNvPr id="5" name="Chart 4"/>
+          <p:cNvPr id="6" name="Chart 5"/>
           <p:cNvGraphicFramePr>
             <a:graphicFrameLocks noGrp="1"/>
           </p:cNvGraphicFramePr>
@@ -5038,8 +5108,43 @@
         </p:nvSpPr>
         <p:spPr>
           <a:xfrm>
+            <a:off x="7772400" y="91440"/>
+            <a:ext cx="3959352" cy="228600"/>
+          </a:xfrm>
+          <a:prstGeom prst="rect">
+            <a:avLst/>
+          </a:prstGeom>
+          <a:noFill/>
+        </p:spPr>
+        <p:txBody>
+          <a:bodyPr wrap="square" anchor="ctr" lIns="45720" rIns="45720" tIns="27432" bIns="27432">
+            <a:spAutoFit/>
+          </a:bodyPr>
+          <a:lstStyle/>
+          <a:p>
+            <a:pPr algn="r"/>
+            <a:r>
+              <a:rPr sz="1125" b="0" i="0">
+                <a:solidFill>
+                  <a:srgbClr val="666666"/>
+                </a:solidFill>
+                <a:latin typeface="Arial"/>
+              </a:rPr>
+              <a:t>2026-09-01</a:t>
+            </a:r>
+          </a:p>
+        </p:txBody>
+      </p:sp>
+      <p:sp>
+        <p:nvSpPr>
+          <p:cNvPr id="4" name="TextBox 3"/>
+          <p:cNvSpPr txBox="1"/>
+          <p:nvPr/>
+        </p:nvSpPr>
+        <p:spPr>
+          <a:xfrm>
             <a:off x="457200" y="6217920"/>
-            <a:ext cx="10360152" cy="365760"/>
+            <a:ext cx="8531352" cy="365760"/>
           </a:xfrm>
           <a:prstGeom prst="rect">
             <a:avLst/>
@@ -5067,7 +5172,7 @@
       </p:sp>
       <p:sp>
         <p:nvSpPr>
-          <p:cNvPr id="4" name="TextBox 3"/>
+          <p:cNvPr id="5" name="TextBox 4"/>
           <p:cNvSpPr txBox="1"/>
           <p:nvPr/>
         </p:nvSpPr>
@@ -5102,7 +5207,7 @@
       </p:sp>
       <p:graphicFrame>
         <p:nvGraphicFramePr>
-          <p:cNvPr id="5" name="Chart 4"/>
+          <p:cNvPr id="6" name="Chart 5"/>
           <p:cNvGraphicFramePr>
             <a:graphicFrameLocks noGrp="1"/>
           </p:cNvGraphicFramePr>
@@ -5177,6 +5282,41 @@
         </p:nvSpPr>
         <p:spPr>
           <a:xfrm>
+            <a:off x="7772400" y="91440"/>
+            <a:ext cx="3959352" cy="228600"/>
+          </a:xfrm>
+          <a:prstGeom prst="rect">
+            <a:avLst/>
+          </a:prstGeom>
+          <a:noFill/>
+        </p:spPr>
+        <p:txBody>
+          <a:bodyPr wrap="square" anchor="ctr" lIns="45720" rIns="45720" tIns="27432" bIns="27432">
+            <a:spAutoFit/>
+          </a:bodyPr>
+          <a:lstStyle/>
+          <a:p>
+            <a:pPr algn="r"/>
+            <a:r>
+              <a:rPr sz="1125" b="0" i="0">
+                <a:solidFill>
+                  <a:srgbClr val="666666"/>
+                </a:solidFill>
+                <a:latin typeface="Arial"/>
+              </a:rPr>
+              <a:t>2026-09-01</a:t>
+            </a:r>
+          </a:p>
+        </p:txBody>
+      </p:sp>
+      <p:sp>
+        <p:nvSpPr>
+          <p:cNvPr id="4" name="TextBox 3"/>
+          <p:cNvSpPr txBox="1"/>
+          <p:nvPr/>
+        </p:nvSpPr>
+        <p:spPr>
+          <a:xfrm>
             <a:off x="10817352" y="6217920"/>
             <a:ext cx="914400" cy="365760"/>
           </a:xfrm>
@@ -5206,7 +5346,7 @@
       </p:sp>
       <p:graphicFrame>
         <p:nvGraphicFramePr>
-          <p:cNvPr id="4" name="Table 3"/>
+          <p:cNvPr id="5" name="Table 4"/>
           <p:cNvGraphicFramePr>
             <a:graphicFrameLocks noGrp="1"/>
           </p:cNvGraphicFramePr>
@@ -5783,6 +5923,41 @@
         </p:nvSpPr>
         <p:spPr>
           <a:xfrm>
+            <a:off x="7772400" y="91440"/>
+            <a:ext cx="3959352" cy="228600"/>
+          </a:xfrm>
+          <a:prstGeom prst="rect">
+            <a:avLst/>
+          </a:prstGeom>
+          <a:noFill/>
+        </p:spPr>
+        <p:txBody>
+          <a:bodyPr wrap="square" anchor="ctr" lIns="45720" rIns="45720" tIns="27432" bIns="27432">
+            <a:spAutoFit/>
+          </a:bodyPr>
+          <a:lstStyle/>
+          <a:p>
+            <a:pPr algn="r"/>
+            <a:r>
+              <a:rPr sz="1125" b="0" i="0">
+                <a:solidFill>
+                  <a:srgbClr val="666666"/>
+                </a:solidFill>
+                <a:latin typeface="Arial"/>
+              </a:rPr>
+              <a:t>2026-09-01</a:t>
+            </a:r>
+          </a:p>
+        </p:txBody>
+      </p:sp>
+      <p:sp>
+        <p:nvSpPr>
+          <p:cNvPr id="4" name="TextBox 3"/>
+          <p:cNvSpPr txBox="1"/>
+          <p:nvPr/>
+        </p:nvSpPr>
+        <p:spPr>
+          <a:xfrm>
             <a:off x="10817352" y="6217920"/>
             <a:ext cx="914400" cy="365760"/>
           </a:xfrm>
@@ -5812,7 +5987,7 @@
       </p:sp>
       <p:graphicFrame>
         <p:nvGraphicFramePr>
-          <p:cNvPr id="4" name="Table 3"/>
+          <p:cNvPr id="5" name="Table 4"/>
           <p:cNvGraphicFramePr>
             <a:graphicFrameLocks noGrp="1"/>
           </p:cNvGraphicFramePr>

--- a/examples/revisao-operacional.pptx
+++ b/examples/revisao-operacional.pptx
@@ -5033,7 +5033,7 @@
       </p:sp>
       <p:graphicFrame>
         <p:nvGraphicFramePr>
-          <p:cNvPr id="6" name="Chart 5"/>
+          <p:cNvPr id="6" name="Chart 5" descr="Produção abaixo da meta em 4 dos últimos 7 dias"/>
           <p:cNvGraphicFramePr>
             <a:graphicFrameLocks noGrp="1"/>
           </p:cNvGraphicFramePr>
@@ -5207,7 +5207,7 @@
       </p:sp>
       <p:graphicFrame>
         <p:nvGraphicFramePr>
-          <p:cNvPr id="6" name="Chart 5"/>
+          <p:cNvPr id="6" name="Chart 5" descr="Troca de ferramenta e falta de material = 70% das paradas"/>
           <p:cNvGraphicFramePr>
             <a:graphicFrameLocks noGrp="1"/>
           </p:cNvGraphicFramePr>
